--- a/PolicyForge_Presentation.pptx
+++ b/PolicyForge_Presentation.pptx
@@ -3263,7 +3263,7 @@
                 </a:solidFill>
                 <a:latin typeface="Arial"/>
               </a:rPr>
-              <a:t>Abhishek Kumar</a:t>
+              <a:t>Shristi Kumar</a:t>
             </a:r>
             <a:br/>
             <a:r>
@@ -3377,7 +3377,7 @@
                 </a:solidFill>
                 <a:latin typeface="Arial"/>
               </a:rPr>
-              <a:t>PolicyForge | Abhishek Kumar | Cotiviti Assessment</a:t>
+              <a:t>PolicyForge | Shristi Kumar | Cotiviti Assessment</a:t>
             </a:r>
           </a:p>
         </p:txBody>
@@ -3712,7 +3712,7 @@
                 </a:solidFill>
                 <a:latin typeface="Arial"/>
               </a:rPr>
-              <a:t>PolicyForge | Abhishek Kumar | Cotiviti Assessment</a:t>
+              <a:t>PolicyForge | Shristi Kumar | Cotiviti Assessment</a:t>
             </a:r>
           </a:p>
         </p:txBody>
@@ -4039,7 +4039,7 @@
                 </a:solidFill>
                 <a:latin typeface="Arial"/>
               </a:rPr>
-              <a:t>PolicyForge | Abhishek Kumar | Cotiviti Assessment</a:t>
+              <a:t>PolicyForge | Shristi Kumar | Cotiviti Assessment</a:t>
             </a:r>
           </a:p>
         </p:txBody>
@@ -4637,7 +4637,7 @@
                 </a:solidFill>
                 <a:latin typeface="Arial"/>
               </a:rPr>
-              <a:t>PolicyForge | Abhishek Kumar | Cotiviti Assessment</a:t>
+              <a:t>PolicyForge | Shristi Kumar | Cotiviti Assessment</a:t>
             </a:r>
           </a:p>
         </p:txBody>
@@ -5982,7 +5982,7 @@
                 </a:solidFill>
                 <a:latin typeface="Arial"/>
               </a:rPr>
-              <a:t>PolicyForge | Abhishek Kumar | Cotiviti Assessment</a:t>
+              <a:t>PolicyForge | Shristi Kumar | Cotiviti Assessment</a:t>
             </a:r>
           </a:p>
         </p:txBody>
@@ -6538,7 +6538,7 @@
                 </a:solidFill>
                 <a:latin typeface="Arial"/>
               </a:rPr>
-              <a:t>PolicyForge | Abhishek Kumar | Cotiviti Assessment</a:t>
+              <a:t>PolicyForge | Shristi Kumar | Cotiviti Assessment</a:t>
             </a:r>
           </a:p>
         </p:txBody>
@@ -6902,7 +6902,7 @@
                 </a:solidFill>
                 <a:latin typeface="Arial"/>
               </a:rPr>
-              <a:t>PolicyForge | Abhishek Kumar | Cotiviti Assessment</a:t>
+              <a:t>PolicyForge | Shristi Kumar | Cotiviti Assessment</a:t>
             </a:r>
           </a:p>
         </p:txBody>
@@ -7497,7 +7497,7 @@
                 </a:solidFill>
                 <a:latin typeface="Arial"/>
               </a:rPr>
-              <a:t>PolicyForge | Abhishek Kumar | Cotiviti Assessment</a:t>
+              <a:t>PolicyForge | Shristi Kumar | Cotiviti Assessment</a:t>
             </a:r>
           </a:p>
         </p:txBody>
@@ -8082,7 +8082,7 @@
                 </a:solidFill>
                 <a:latin typeface="Arial"/>
               </a:rPr>
-              <a:t>PolicyForge | Abhishek Kumar | Cotiviti Assessment</a:t>
+              <a:t>PolicyForge | Shristi Kumar | Cotiviti Assessment</a:t>
             </a:r>
           </a:p>
         </p:txBody>
